--- a/docs/PPT/04-information-context-data.pptx
+++ b/docs/PPT/04-information-context-data.pptx
@@ -8200,7 +8200,7 @@
                 </a:solidFill>
                 <a:latin typeface="Calibri"/>
               </a:rPr>
-              <a:t>Adam states clearly what could not be gathered.</a:t>
+              <a:t>PFF Chat AI states clearly what could not be gathered.</a:t>
             </a:r>
           </a:p>
         </p:txBody>
@@ -9366,7 +9366,7 @@
                 </a:solidFill>
                 <a:latin typeface="Calibri"/>
               </a:rPr>
-              <a:t>This envelope is what lets Adam communicate precise, factual state and next actions.</a:t>
+              <a:t>This envelope is what lets PFF Chat AI communicate precise, factual state and next actions.</a:t>
             </a:r>
           </a:p>
         </p:txBody>
